--- a/classes/parte-6-analisis-de-malware/150-ransomware-anatomia-y-analisis/clase-150-presentacion.pptx
+++ b/classes/parte-6-analisis-de-malware/150-ransomware-anatomia-y-analisis/clase-150-presentacion.pptx
@@ -17,6 +17,9 @@
     <p:sldId id="265" r:id="rId16"/>
     <p:sldId id="266" r:id="rId17"/>
     <p:sldId id="267" r:id="rId18"/>
+    <p:sldId id="268" r:id="rId19"/>
+    <p:sldId id="269" r:id="rId20"/>
+    <p:sldId id="270" r:id="rId21"/>
   </p:sldIdLst>
   <p:sldSz cx="9144000" cy="6858000" type="screen4x3"/>
   <p:notesSz cx="6858000" cy="9144000"/>
@@ -3198,7 +3201,7 @@
                   <a:srgbClr val="0B3D2E"/>
                 </a:solidFill>
               </a:rPr>
-              <a:t>⚠️ Errores comunes</a:t>
+              <a:t>✍️ Ejercicios</a:t>
             </a:r>
           </a:p>
         </p:txBody>
@@ -3236,67 +3239,82 @@
                   <a:srgbClr val="22282E"/>
                 </a:solidFill>
               </a:rPr>
-              <a:t>•  Cifra el host de análisis — Carpeta compartida activa; aíslala y restaura snapshot</a:t>
-            </a:r>
-          </a:p>
-          <a:p>
-            <a:pPr>
-              <a:spcAft>
-                <a:spcPts val="600"/>
-              </a:spcAft>
-            </a:pPr>
-            <a:r>
-              <a:rPr sz="1500">
-                <a:solidFill>
-                  <a:srgbClr val="22282E"/>
-                </a:solidFill>
-              </a:rPr>
-              <a:t>•  "Es descifrable" sin pruebas — Verifica el esquema real; el híbrido correcto no lo es</a:t>
-            </a:r>
-          </a:p>
-          <a:p>
-            <a:pPr>
-              <a:spcAft>
-                <a:spcPts val="600"/>
-              </a:spcAft>
-            </a:pPr>
-            <a:r>
-              <a:rPr sz="1500">
-                <a:solidFill>
-                  <a:srgbClr val="22282E"/>
-                </a:solidFill>
-              </a:rPr>
-              <a:t>•  Ignorar la exfiltración — Revisa tráfico previo al cifrado; hay doble extorsión</a:t>
-            </a:r>
-          </a:p>
-          <a:p>
-            <a:pPr>
-              <a:spcAft>
-                <a:spcPts val="600"/>
-              </a:spcAft>
-            </a:pPr>
-            <a:r>
-              <a:rPr sz="1500">
-                <a:solidFill>
-                  <a:srgbClr val="22282E"/>
-                </a:solidFill>
-              </a:rPr>
-              <a:t>•  No ver el borrado de VSS — Filtra procesos hijos vssadmin/wmic en ProcMon</a:t>
-            </a:r>
-          </a:p>
-          <a:p>
-            <a:pPr>
-              <a:spcAft>
-                <a:spcPts val="600"/>
-              </a:spcAft>
-            </a:pPr>
-            <a:r>
-              <a:rPr sz="1500">
-                <a:solidFill>
-                  <a:srgbClr val="22282E"/>
-                </a:solidFill>
-              </a:rPr>
-              <a:t>•  Confundir familia por la extensión — La extensión puede variar; correlaciona con la nota y TTPs</a:t>
+              <a:t>•  Explica el cifrado híbrido y por qué hace inviable descifrar sin la clave privada.</a:t>
+            </a:r>
+          </a:p>
+          <a:p>
+            <a:pPr>
+              <a:spcAft>
+                <a:spcPts val="600"/>
+              </a:spcAft>
+            </a:pPr>
+            <a:r>
+              <a:rPr sz="1500">
+                <a:solidFill>
+                  <a:srgbClr val="22282E"/>
+                </a:solidFill>
+              </a:rPr>
+              <a:t>•  Detecta y documenta los comandos de borrado de shadow copies.</a:t>
+            </a:r>
+          </a:p>
+          <a:p>
+            <a:pPr>
+              <a:spcAft>
+                <a:spcPts val="600"/>
+              </a:spcAft>
+            </a:pPr>
+            <a:r>
+              <a:rPr sz="1500">
+                <a:solidFill>
+                  <a:srgbClr val="22282E"/>
+                </a:solidFill>
+              </a:rPr>
+              <a:t>•  Analiza una nota de rescate e infiere la familia.</a:t>
+            </a:r>
+          </a:p>
+          <a:p>
+            <a:pPr>
+              <a:spcAft>
+                <a:spcPts val="600"/>
+              </a:spcAft>
+            </a:pPr>
+            <a:r>
+              <a:rPr sz="1500">
+                <a:solidFill>
+                  <a:srgbClr val="22282E"/>
+                </a:solidFill>
+              </a:rPr>
+              <a:t>•  Propón 3 controles preventivos priorizados (backups, EDR, segmentación).</a:t>
+            </a:r>
+          </a:p>
+          <a:p>
+            <a:pPr>
+              <a:spcAft>
+                <a:spcPts val="600"/>
+              </a:spcAft>
+            </a:pPr>
+            <a:r>
+              <a:rPr sz="1500">
+                <a:solidFill>
+                  <a:srgbClr val="22282E"/>
+                </a:solidFill>
+              </a:rPr>
+              <a:t>•  Reconoce señales de exfiltración previa al cifrado.</a:t>
+            </a:r>
+          </a:p>
+          <a:p>
+            <a:pPr>
+              <a:spcAft>
+                <a:spcPts val="600"/>
+              </a:spcAft>
+            </a:pPr>
+            <a:r>
+              <a:rPr sz="1500">
+                <a:solidFill>
+                  <a:srgbClr val="22282E"/>
+                </a:solidFill>
+              </a:rPr>
+              <a:t>•  Diseña una detección temprana basada en el patrón de escritura masiva.</a:t>
             </a:r>
           </a:p>
         </p:txBody>
@@ -3347,7 +3365,7 @@
                   <a:srgbClr val="0B3D2E"/>
                 </a:solidFill>
               </a:rPr>
-              <a:t>❓ Preguntas frecuentes</a:t>
+              <a:t>📝 Reto verificable</a:t>
             </a:r>
           </a:p>
         </p:txBody>
@@ -3385,37 +3403,22 @@
                   <a:srgbClr val="22282E"/>
                 </a:solidFill>
               </a:rPr>
-              <a:t>•  ❓ ¿Se puede descifrar sin pagar? A veces: si hay errores criptográficos, claves filtradas o descifradores públicos (No More Ransom). Con cifrado híbrido bien hecho y backups destruidos, normalmente no.</a:t>
-            </a:r>
-          </a:p>
-          <a:p>
-            <a:pPr>
-              <a:spcAft>
-                <a:spcPts val="600"/>
-              </a:spcAft>
-            </a:pPr>
-            <a:r>
-              <a:rPr sz="1500">
-                <a:solidFill>
-                  <a:srgbClr val="22282E"/>
-                </a:solidFill>
-              </a:rPr>
-              <a:t>•  ❓ ¿Por qué borran las shadow copies? Para impedir la recuperación local de Windows y forzar el pago.</a:t>
-            </a:r>
-          </a:p>
-          <a:p>
-            <a:pPr>
-              <a:spcAft>
-                <a:spcPts val="600"/>
-              </a:spcAft>
-            </a:pPr>
-            <a:r>
-              <a:rPr sz="1500">
-                <a:solidFill>
-                  <a:srgbClr val="22282E"/>
-                </a:solidFill>
-              </a:rPr>
-              <a:t>•  ❓ ¿El cifrado es lo primero que ocurre? No. Suele ser la fase final; antes hay acceso, escalada, movimiento lateral y exfiltración. Detectar temprano evita el cifrado.</a:t>
+              <a:t>•  Entrega un informe de ransomware con: cadena de ataque mapeada a ATT&amp;CK, esquema de cifrado descrito, evidencia de borrado de backups, veredicto de recuperabilidad justificado e IOCs (incl. nota y…</a:t>
+            </a:r>
+          </a:p>
+          <a:p>
+            <a:pPr>
+              <a:spcAft>
+                <a:spcPts val="600"/>
+              </a:spcAft>
+            </a:pPr>
+            <a:r>
+              <a:rPr sz="1500">
+                <a:solidFill>
+                  <a:srgbClr val="22282E"/>
+                </a:solidFill>
+              </a:rPr>
+              <a:t>•  Criterio de aceptación: el informe justifica con evidencia si el descifrado sin clave es posible, y la cadena incluye al menos las fases de ejecución, evasión (T1490) e impacto (T1486).</a:t>
             </a:r>
           </a:p>
         </p:txBody>
@@ -3466,7 +3469,7 @@
                   <a:srgbClr val="0B3D2E"/>
                 </a:solidFill>
               </a:rPr>
-              <a:t>🔗 Referencias</a:t>
+              <a:t>⚠️ Errores comunes</a:t>
             </a:r>
           </a:p>
         </p:txBody>
@@ -3504,6 +3507,274 @@
                   <a:srgbClr val="22282E"/>
                 </a:solidFill>
               </a:rPr>
+              <a:t>•  Cifra el host de análisis — Carpeta compartida activa; aíslala y restaura snapshot</a:t>
+            </a:r>
+          </a:p>
+          <a:p>
+            <a:pPr>
+              <a:spcAft>
+                <a:spcPts val="600"/>
+              </a:spcAft>
+            </a:pPr>
+            <a:r>
+              <a:rPr sz="1500">
+                <a:solidFill>
+                  <a:srgbClr val="22282E"/>
+                </a:solidFill>
+              </a:rPr>
+              <a:t>•  "Es descifrable" sin pruebas — Verifica el esquema real; el híbrido correcto no lo es</a:t>
+            </a:r>
+          </a:p>
+          <a:p>
+            <a:pPr>
+              <a:spcAft>
+                <a:spcPts val="600"/>
+              </a:spcAft>
+            </a:pPr>
+            <a:r>
+              <a:rPr sz="1500">
+                <a:solidFill>
+                  <a:srgbClr val="22282E"/>
+                </a:solidFill>
+              </a:rPr>
+              <a:t>•  Ignorar la exfiltración — Revisa tráfico previo al cifrado; hay doble extorsión</a:t>
+            </a:r>
+          </a:p>
+          <a:p>
+            <a:pPr>
+              <a:spcAft>
+                <a:spcPts val="600"/>
+              </a:spcAft>
+            </a:pPr>
+            <a:r>
+              <a:rPr sz="1500">
+                <a:solidFill>
+                  <a:srgbClr val="22282E"/>
+                </a:solidFill>
+              </a:rPr>
+              <a:t>•  No ver el borrado de VSS — Filtra procesos hijos vssadmin/wmic en ProcMon</a:t>
+            </a:r>
+          </a:p>
+          <a:p>
+            <a:pPr>
+              <a:spcAft>
+                <a:spcPts val="600"/>
+              </a:spcAft>
+            </a:pPr>
+            <a:r>
+              <a:rPr sz="1500">
+                <a:solidFill>
+                  <a:srgbClr val="22282E"/>
+                </a:solidFill>
+              </a:rPr>
+              <a:t>•  Confundir familia por la extensión — La extensión puede variar; correlaciona con la nota y TTPs</a:t>
+            </a:r>
+          </a:p>
+        </p:txBody>
+      </p:sp>
+    </p:spTree>
+  </p:cSld>
+  <p:clrMapOvr>
+    <a:masterClrMapping/>
+  </p:clrMapOvr>
+</p:sld>
+</file>
+
+<file path=ppt/slides/slide13.xml><?xml version="1.0" encoding="utf-8"?>
+<p:sld xmlns:a="http://schemas.openxmlformats.org/drawingml/2006/main" xmlns:p="http://schemas.openxmlformats.org/presentationml/2006/main" xmlns:r="http://schemas.openxmlformats.org/officeDocument/2006/relationships">
+  <p:cSld>
+    <p:spTree>
+      <p:nvGrpSpPr>
+        <p:cNvPr id="1" name=""/>
+        <p:cNvGrpSpPr/>
+        <p:nvPr/>
+      </p:nvGrpSpPr>
+      <p:grpSpPr/>
+      <p:sp>
+        <p:nvSpPr>
+          <p:cNvPr id="2" name="TextBox 1"/>
+          <p:cNvSpPr txBox="1"/>
+          <p:nvPr/>
+        </p:nvSpPr>
+        <p:spPr>
+          <a:xfrm>
+            <a:off x="457200" y="320040"/>
+            <a:ext cx="8229600" cy="822960"/>
+          </a:xfrm>
+          <a:prstGeom prst="rect">
+            <a:avLst/>
+          </a:prstGeom>
+          <a:noFill/>
+        </p:spPr>
+        <p:txBody>
+          <a:bodyPr wrap="square">
+            <a:spAutoFit/>
+          </a:bodyPr>
+          <a:lstStyle/>
+          <a:p>
+            <a:r>
+              <a:rPr sz="2600" b="1">
+                <a:solidFill>
+                  <a:srgbClr val="0B3D2E"/>
+                </a:solidFill>
+              </a:rPr>
+              <a:t>❓ Preguntas frecuentes</a:t>
+            </a:r>
+          </a:p>
+        </p:txBody>
+      </p:sp>
+      <p:sp>
+        <p:nvSpPr>
+          <p:cNvPr id="3" name="TextBox 2"/>
+          <p:cNvSpPr txBox="1"/>
+          <p:nvPr/>
+        </p:nvSpPr>
+        <p:spPr>
+          <a:xfrm>
+            <a:off x="457200" y="1280160"/>
+            <a:ext cx="8229600" cy="4937760"/>
+          </a:xfrm>
+          <a:prstGeom prst="rect">
+            <a:avLst/>
+          </a:prstGeom>
+          <a:noFill/>
+        </p:spPr>
+        <p:txBody>
+          <a:bodyPr wrap="square">
+            <a:spAutoFit/>
+          </a:bodyPr>
+          <a:lstStyle/>
+          <a:p>
+            <a:pPr>
+              <a:spcAft>
+                <a:spcPts val="600"/>
+              </a:spcAft>
+            </a:pPr>
+            <a:r>
+              <a:rPr sz="1500">
+                <a:solidFill>
+                  <a:srgbClr val="22282E"/>
+                </a:solidFill>
+              </a:rPr>
+              <a:t>•  ❓ ¿Se puede descifrar sin pagar? A veces: si hay errores criptográficos, claves filtradas o descifradores públicos (No More Ransom). Con cifrado híbrido bien hecho y backups destruidos, normalmente…</a:t>
+            </a:r>
+          </a:p>
+          <a:p>
+            <a:pPr>
+              <a:spcAft>
+                <a:spcPts val="600"/>
+              </a:spcAft>
+            </a:pPr>
+            <a:r>
+              <a:rPr sz="1500">
+                <a:solidFill>
+                  <a:srgbClr val="22282E"/>
+                </a:solidFill>
+              </a:rPr>
+              <a:t>•  ❓ ¿Por qué borran las shadow copies? Para impedir la recuperación local de Windows y forzar el pago.</a:t>
+            </a:r>
+          </a:p>
+          <a:p>
+            <a:pPr>
+              <a:spcAft>
+                <a:spcPts val="600"/>
+              </a:spcAft>
+            </a:pPr>
+            <a:r>
+              <a:rPr sz="1500">
+                <a:solidFill>
+                  <a:srgbClr val="22282E"/>
+                </a:solidFill>
+              </a:rPr>
+              <a:t>•  ❓ ¿El cifrado es lo primero que ocurre? No. Suele ser la fase final; antes hay acceso, escalada, movimiento lateral y exfiltración. Detectar temprano evita el cifrado.</a:t>
+            </a:r>
+          </a:p>
+        </p:txBody>
+      </p:sp>
+    </p:spTree>
+  </p:cSld>
+  <p:clrMapOvr>
+    <a:masterClrMapping/>
+  </p:clrMapOvr>
+</p:sld>
+</file>
+
+<file path=ppt/slides/slide14.xml><?xml version="1.0" encoding="utf-8"?>
+<p:sld xmlns:a="http://schemas.openxmlformats.org/drawingml/2006/main" xmlns:p="http://schemas.openxmlformats.org/presentationml/2006/main" xmlns:r="http://schemas.openxmlformats.org/officeDocument/2006/relationships">
+  <p:cSld>
+    <p:spTree>
+      <p:nvGrpSpPr>
+        <p:cNvPr id="1" name=""/>
+        <p:cNvGrpSpPr/>
+        <p:nvPr/>
+      </p:nvGrpSpPr>
+      <p:grpSpPr/>
+      <p:sp>
+        <p:nvSpPr>
+          <p:cNvPr id="2" name="TextBox 1"/>
+          <p:cNvSpPr txBox="1"/>
+          <p:nvPr/>
+        </p:nvSpPr>
+        <p:spPr>
+          <a:xfrm>
+            <a:off x="457200" y="320040"/>
+            <a:ext cx="8229600" cy="822960"/>
+          </a:xfrm>
+          <a:prstGeom prst="rect">
+            <a:avLst/>
+          </a:prstGeom>
+          <a:noFill/>
+        </p:spPr>
+        <p:txBody>
+          <a:bodyPr wrap="square">
+            <a:spAutoFit/>
+          </a:bodyPr>
+          <a:lstStyle/>
+          <a:p>
+            <a:r>
+              <a:rPr sz="2600" b="1">
+                <a:solidFill>
+                  <a:srgbClr val="0B3D2E"/>
+                </a:solidFill>
+              </a:rPr>
+              <a:t>🔗 Referencias</a:t>
+            </a:r>
+          </a:p>
+        </p:txBody>
+      </p:sp>
+      <p:sp>
+        <p:nvSpPr>
+          <p:cNvPr id="3" name="TextBox 2"/>
+          <p:cNvSpPr txBox="1"/>
+          <p:nvPr/>
+        </p:nvSpPr>
+        <p:spPr>
+          <a:xfrm>
+            <a:off x="457200" y="1280160"/>
+            <a:ext cx="8229600" cy="4937760"/>
+          </a:xfrm>
+          <a:prstGeom prst="rect">
+            <a:avLst/>
+          </a:prstGeom>
+          <a:noFill/>
+        </p:spPr>
+        <p:txBody>
+          <a:bodyPr wrap="square">
+            <a:spAutoFit/>
+          </a:bodyPr>
+          <a:lstStyle/>
+          <a:p>
+            <a:pPr>
+              <a:spcAft>
+                <a:spcPts val="600"/>
+              </a:spcAft>
+            </a:pPr>
+            <a:r>
+              <a:rPr sz="1500">
+                <a:solidFill>
+                  <a:srgbClr val="22282E"/>
+                </a:solidFill>
+              </a:rPr>
               <a:t>•  Monnappa K. A., Learning Malware Analysis.</a:t>
             </a:r>
           </a:p>
@@ -3554,6 +3825,81 @@
           </a:p>
         </p:txBody>
       </p:sp>
+    </p:spTree>
+  </p:cSld>
+  <p:clrMapOvr>
+    <a:masterClrMapping/>
+  </p:clrMapOvr>
+</p:sld>
+</file>
+
+<file path=ppt/slides/slide15.xml><?xml version="1.0" encoding="utf-8"?>
+<p:sld xmlns:a="http://schemas.openxmlformats.org/drawingml/2006/main" xmlns:p="http://schemas.openxmlformats.org/presentationml/2006/main" xmlns:r="http://schemas.openxmlformats.org/officeDocument/2006/relationships">
+  <p:cSld>
+    <p:spTree>
+      <p:nvGrpSpPr>
+        <p:cNvPr id="1" name=""/>
+        <p:cNvGrpSpPr/>
+        <p:nvPr/>
+      </p:nvGrpSpPr>
+      <p:grpSpPr/>
+      <p:sp>
+        <p:nvSpPr>
+          <p:cNvPr id="2" name="TextBox 1"/>
+          <p:cNvSpPr txBox="1"/>
+          <p:nvPr/>
+        </p:nvSpPr>
+        <p:spPr>
+          <a:xfrm>
+            <a:off x="457200" y="274320"/>
+            <a:ext cx="8229600" cy="640080"/>
+          </a:xfrm>
+          <a:prstGeom prst="rect">
+            <a:avLst/>
+          </a:prstGeom>
+          <a:noFill/>
+        </p:spPr>
+        <p:txBody>
+          <a:bodyPr wrap="square">
+            <a:spAutoFit/>
+          </a:bodyPr>
+          <a:lstStyle/>
+          <a:p>
+            <a:r>
+              <a:rPr sz="2200" b="1">
+                <a:solidFill>
+                  <a:srgbClr val="0B3D2E"/>
+                </a:solidFill>
+              </a:rPr>
+              <a:t>Diagrama de la clase</a:t>
+            </a:r>
+          </a:p>
+        </p:txBody>
+      </p:sp>
+      <p:pic>
+        <p:nvPicPr>
+          <p:cNvPr id="3" name="Picture 2" descr="b780a5760b5b6454.png"/>
+          <p:cNvPicPr>
+            <a:picLocks noChangeAspect="1"/>
+          </p:cNvPicPr>
+          <p:nvPr/>
+        </p:nvPicPr>
+        <p:blipFill>
+          <a:blip r:embed="rId2"/>
+          <a:stretch>
+            <a:fillRect/>
+          </a:stretch>
+        </p:blipFill>
+        <p:spPr>
+          <a:xfrm>
+            <a:off x="457200" y="3465576"/>
+            <a:ext cx="8229600" cy="566928"/>
+          </a:xfrm>
+          <a:prstGeom prst="rect">
+            <a:avLst/>
+          </a:prstGeom>
+        </p:spPr>
+      </p:pic>
     </p:spTree>
   </p:cSld>
   <p:clrMapOvr>
@@ -3638,7 +3984,7 @@
                   <a:srgbClr val="22282E"/>
                 </a:solidFill>
               </a:rPr>
-              <a:t>•  Diseccionar la familia de mayor impacto económico actual: el ransomware. El alumno analizará su cadena completa (acceso, escalada, movimiento, exfiltración y cifrado), estudiará el esquema criptográfico, evaluará si el descifrado es posible sin la clave y extraerá IOCs y TTPs para prevención y respuesta.</a:t>
+              <a:t>•  Diseccionar la familia de mayor impacto económico actual: el ransomware. El alumno analizará su cadena completa (acceso, escalada, movimiento, exfiltración y cifrado), estudiará el esquema…</a:t>
             </a:r>
           </a:p>
         </p:txBody>
@@ -4032,7 +4378,7 @@
                   <a:srgbClr val="0B3D2E"/>
                 </a:solidFill>
               </a:rPr>
-              <a:t>📖 Definiciones y características</a:t>
+              <a:t>🧠 Explicación en profundidad</a:t>
             </a:r>
           </a:p>
         </p:txBody>
@@ -4070,67 +4416,97 @@
                   <a:srgbClr val="22282E"/>
                 </a:solidFill>
               </a:rPr>
-              <a:t>•  RaaS (Ransomware-as-a-Service): modelo con operadores y afiliados. Característica clave: división del trabajo.</a:t>
-            </a:r>
-          </a:p>
-          <a:p>
-            <a:pPr>
-              <a:spcAft>
-                <a:spcPts val="600"/>
-              </a:spcAft>
-            </a:pPr>
-            <a:r>
-              <a:rPr sz="1500">
-                <a:solidFill>
-                  <a:srgbClr val="22282E"/>
-                </a:solidFill>
-              </a:rPr>
-              <a:t>•  Cifrado híbrido: clave simétrica por archivo protegida con clave pública. Característica clave: rápido + irrecuperable sin la privada.</a:t>
-            </a:r>
-          </a:p>
-          <a:p>
-            <a:pPr>
-              <a:spcAft>
-                <a:spcPts val="600"/>
-              </a:spcAft>
-            </a:pPr>
-            <a:r>
-              <a:rPr sz="1500">
-                <a:solidFill>
-                  <a:srgbClr val="22282E"/>
-                </a:solidFill>
-              </a:rPr>
-              <a:t>•  Shadow copies: copias VSS de Windows. Característica clave: el ransomware las borra (vssadmin delete shadows).</a:t>
-            </a:r>
-          </a:p>
-          <a:p>
-            <a:pPr>
-              <a:spcAft>
-                <a:spcPts val="600"/>
-              </a:spcAft>
-            </a:pPr>
-            <a:r>
-              <a:rPr sz="1500">
-                <a:solidFill>
-                  <a:srgbClr val="22282E"/>
-                </a:solidFill>
-              </a:rPr>
-              <a:t>•  Doble extorsión: exfiltrar datos antes de cifrar. Característica clave: chantaje con filtración.</a:t>
-            </a:r>
-          </a:p>
-          <a:p>
-            <a:pPr>
-              <a:spcAft>
-                <a:spcPts val="600"/>
-              </a:spcAft>
-            </a:pPr>
-            <a:r>
-              <a:rPr sz="1500">
-                <a:solidFill>
-                  <a:srgbClr val="22282E"/>
-                </a:solidFill>
-              </a:rPr>
-              <a:t>•  Nota de rescate: instrucciones de pago. Característica clave: firma de familia.</a:t>
+              <a:t>•  El ransomware —malware que cifra los datos de la víctima y exige un rescate por la clave— es la</a:t>
+            </a:r>
+          </a:p>
+          <a:p>
+            <a:pPr>
+              <a:spcAft>
+                <a:spcPts val="600"/>
+              </a:spcAft>
+            </a:pPr>
+            <a:r>
+              <a:rPr sz="1500">
+                <a:solidFill>
+                  <a:srgbClr val="22282E"/>
+                </a:solidFill>
+              </a:rPr>
+              <a:t>•  amenaza de mayor impacto económico de los últimos años, y su análisis reúne casi todo lo de la parte:</a:t>
+            </a:r>
+          </a:p>
+          <a:p>
+            <a:pPr>
+              <a:spcAft>
+                <a:spcPts val="600"/>
+              </a:spcAft>
+            </a:pPr>
+            <a:r>
+              <a:rPr sz="1500">
+                <a:solidFill>
+                  <a:srgbClr val="22282E"/>
+                </a:solidFill>
+              </a:rPr>
+              <a:t>•  criptografía, C2, persistencia, evasión. Entender su anatomía importa porque determina la respuesta: si</a:t>
+            </a:r>
+          </a:p>
+          <a:p>
+            <a:pPr>
+              <a:spcAft>
+                <a:spcPts val="600"/>
+              </a:spcAft>
+            </a:pPr>
+            <a:r>
+              <a:rPr sz="1500">
+                <a:solidFill>
+                  <a:srgbClr val="22282E"/>
+                </a:solidFill>
+              </a:rPr>
+              <a:t>•  el esquema criptográfico es sólido, no hay recuperación sin la clave (y pagar es problemático); si</a:t>
+            </a:r>
+          </a:p>
+          <a:p>
+            <a:pPr>
+              <a:spcAft>
+                <a:spcPts val="600"/>
+              </a:spcAft>
+            </a:pPr>
+            <a:r>
+              <a:rPr sz="1500">
+                <a:solidFill>
+                  <a:srgbClr val="22282E"/>
+                </a:solidFill>
+              </a:rPr>
+              <a:t>•  tiene un fallo de implementación, a veces existe un descifrador. Y porque el ransomware moderno ha</a:t>
+            </a:r>
+          </a:p>
+          <a:p>
+            <a:pPr>
+              <a:spcAft>
+                <a:spcPts val="600"/>
+              </a:spcAft>
+            </a:pPr>
+            <a:r>
+              <a:rPr sz="1500">
+                <a:solidFill>
+                  <a:srgbClr val="22282E"/>
+                </a:solidFill>
+              </a:rPr>
+              <a:t>•  evolucionado de un cifrado oportunista a una industria con división del trabajo.</a:t>
+            </a:r>
+          </a:p>
+          <a:p>
+            <a:pPr>
+              <a:spcAft>
+                <a:spcPts val="600"/>
+              </a:spcAft>
+            </a:pPr>
+            <a:r>
+              <a:rPr sz="1500">
+                <a:solidFill>
+                  <a:srgbClr val="22282E"/>
+                </a:solidFill>
+              </a:rPr>
+              <a:t>•  El ransomware actual funciona como RaaS (Ransomware-as-a-Service): los desarrolladores crean</a:t>
             </a:r>
           </a:p>
         </p:txBody>
@@ -4181,7 +4557,7 @@
                   <a:srgbClr val="0B3D2E"/>
                 </a:solidFill>
               </a:rPr>
-              <a:t>🧰 Herramientas y preparación</a:t>
+              <a:t>📖 Definiciones y características</a:t>
             </a:r>
           </a:p>
         </p:txBody>
@@ -4219,52 +4595,67 @@
                   <a:srgbClr val="22282E"/>
                 </a:solidFill>
               </a:rPr>
-              <a:t>•  ProcMon/Process Hacker, Wireshark, Volatility para comportamiento.</a:t>
-            </a:r>
-          </a:p>
-          <a:p>
-            <a:pPr>
-              <a:spcAft>
-                <a:spcPts val="600"/>
-              </a:spcAft>
-            </a:pPr>
-            <a:r>
-              <a:rPr sz="1500">
-                <a:solidFill>
-                  <a:srgbClr val="22282E"/>
-                </a:solidFill>
-              </a:rPr>
-              <a:t>•  Ghidra/x64dbg para el módulo de cifrado.</a:t>
-            </a:r>
-          </a:p>
-          <a:p>
-            <a:pPr>
-              <a:spcAft>
-                <a:spcPts val="600"/>
-              </a:spcAft>
-            </a:pPr>
-            <a:r>
-              <a:rPr sz="1500">
-                <a:solidFill>
-                  <a:srgbClr val="22282E"/>
-                </a:solidFill>
-              </a:rPr>
-              <a:t>•  PEStudio/capa para detectar APIs de cripto (CryptGenKey, CryptEncrypt, BCrypt).</a:t>
-            </a:r>
-          </a:p>
-          <a:p>
-            <a:pPr>
-              <a:spcAft>
-                <a:spcPts val="600"/>
-              </a:spcAft>
-            </a:pPr>
-            <a:r>
-              <a:rPr sz="1500">
-                <a:solidFill>
-                  <a:srgbClr val="22282E"/>
-                </a:solidFill>
-              </a:rPr>
-              <a:t>•  Referencias: No More Ransom, informes de The DFIR Report.</a:t>
+              <a:t>•  RaaS (Ransomware-as-a-Service): modelo con operadores y afiliados. Característica clave: división del trabajo.</a:t>
+            </a:r>
+          </a:p>
+          <a:p>
+            <a:pPr>
+              <a:spcAft>
+                <a:spcPts val="600"/>
+              </a:spcAft>
+            </a:pPr>
+            <a:r>
+              <a:rPr sz="1500">
+                <a:solidFill>
+                  <a:srgbClr val="22282E"/>
+                </a:solidFill>
+              </a:rPr>
+              <a:t>•  Cifrado híbrido: clave simétrica por archivo protegida con clave pública. Característica clave: rápido + irrecuperable sin la privada.</a:t>
+            </a:r>
+          </a:p>
+          <a:p>
+            <a:pPr>
+              <a:spcAft>
+                <a:spcPts val="600"/>
+              </a:spcAft>
+            </a:pPr>
+            <a:r>
+              <a:rPr sz="1500">
+                <a:solidFill>
+                  <a:srgbClr val="22282E"/>
+                </a:solidFill>
+              </a:rPr>
+              <a:t>•  Shadow copies: copias VSS de Windows. Característica clave: el ransomware las borra (vssadmin delete shadows).</a:t>
+            </a:r>
+          </a:p>
+          <a:p>
+            <a:pPr>
+              <a:spcAft>
+                <a:spcPts val="600"/>
+              </a:spcAft>
+            </a:pPr>
+            <a:r>
+              <a:rPr sz="1500">
+                <a:solidFill>
+                  <a:srgbClr val="22282E"/>
+                </a:solidFill>
+              </a:rPr>
+              <a:t>•  Doble extorsión: exfiltrar datos antes de cifrar. Característica clave: chantaje con filtración.</a:t>
+            </a:r>
+          </a:p>
+          <a:p>
+            <a:pPr>
+              <a:spcAft>
+                <a:spcPts val="600"/>
+              </a:spcAft>
+            </a:pPr>
+            <a:r>
+              <a:rPr sz="1500">
+                <a:solidFill>
+                  <a:srgbClr val="22282E"/>
+                </a:solidFill>
+              </a:rPr>
+              <a:t>•  Nota de rescate: instrucciones de pago. Característica clave: firma de familia.</a:t>
             </a:r>
           </a:p>
         </p:txBody>
@@ -4315,7 +4706,7 @@
                   <a:srgbClr val="0B3D2E"/>
                 </a:solidFill>
               </a:rPr>
-              <a:t>🧪 Laboratorio guiado</a:t>
+              <a:t>📔 Glosario</a:t>
             </a:r>
           </a:p>
         </p:txBody>
@@ -4353,97 +4744,97 @@
                   <a:srgbClr val="22282E"/>
                 </a:solidFill>
               </a:rPr>
-              <a:t>•  Restaura base-clean. Crea archivos señuelo (.docx, .txt, .jpg) en carpetas de usuario para observar el cifrado.</a:t>
-            </a:r>
-          </a:p>
-          <a:p>
-            <a:pPr>
-              <a:spcAft>
-                <a:spcPts val="600"/>
-              </a:spcAft>
-            </a:pPr>
-            <a:r>
-              <a:rPr sz="1500">
-                <a:solidFill>
-                  <a:srgbClr val="22282E"/>
-                </a:solidFill>
-              </a:rPr>
-              <a:t>•  Analiza estáticamente: con capa/PEStudio identifica APIs de cripto y enumeración de archivos (FindFirstFile, CryptEncrypt).</a:t>
-            </a:r>
-          </a:p>
-          <a:p>
-            <a:pPr>
-              <a:spcAft>
-                <a:spcPts val="600"/>
-              </a:spcAft>
-            </a:pPr>
-            <a:r>
-              <a:rPr sz="1500">
-                <a:solidFill>
-                  <a:srgbClr val="22282E"/>
-                </a:solidFill>
-              </a:rPr>
-              <a:t>•  Detona con ProcMon filtrando por CreateFile/WriteFile: observa el patrón de recorrido de directorios y la escritura de archivos cifrados (nueva extensión, marcador de cabecera).</a:t>
-            </a:r>
-          </a:p>
-          <a:p>
-            <a:pPr>
-              <a:spcAft>
-                <a:spcPts val="600"/>
-              </a:spcAft>
-            </a:pPr>
-            <a:r>
-              <a:rPr sz="1500">
-                <a:solidFill>
-                  <a:srgbClr val="22282E"/>
-                </a:solidFill>
-              </a:rPr>
-              <a:t>•  Busca el borrado de recuperación: vssadmin delete shadows, wbadmin, bcdedit. Anótalo como TTP (T1490).</a:t>
-            </a:r>
-          </a:p>
-          <a:p>
-            <a:pPr>
-              <a:spcAft>
-                <a:spcPts val="600"/>
-              </a:spcAft>
-            </a:pPr>
-            <a:r>
-              <a:rPr sz="1500">
-                <a:solidFill>
-                  <a:srgbClr val="22282E"/>
-                </a:solidFill>
-              </a:rPr>
-              <a:t>•  En Wireshark, comprueba si hay contacto C2 o exfiltración previa al cifrado (doble extorsión).</a:t>
-            </a:r>
-          </a:p>
-          <a:p>
-            <a:pPr>
-              <a:spcAft>
-                <a:spcPts val="600"/>
-              </a:spcAft>
-            </a:pPr>
-            <a:r>
-              <a:rPr sz="1500">
-                <a:solidFill>
-                  <a:srgbClr val="22282E"/>
-                </a:solidFill>
-              </a:rPr>
-              <a:t>•  En Ghidra, localiza el módulo de cifrado: ¿AES por archivo?, ¿cómo se genera y protege la clave?, ¿RSA embebido? Documenta el esquema.</a:t>
-            </a:r>
-          </a:p>
-          <a:p>
-            <a:pPr>
-              <a:spcAft>
-                <a:spcPts val="600"/>
-              </a:spcAft>
-            </a:pPr>
-            <a:r>
-              <a:rPr sz="1500">
-                <a:solidFill>
-                  <a:srgbClr val="22282E"/>
-                </a:solidFill>
-              </a:rPr>
-              <a:t>•  Evalúa la recuperación: ¿clave reutilizada?, ¿IV predecible?, ¿nota con ID de víctima? Contrasta con No More Ransom.</a:t>
+              <a:t>•  Término — Definición concisa</a:t>
+            </a:r>
+          </a:p>
+          <a:p>
+            <a:pPr>
+              <a:spcAft>
+                <a:spcPts val="600"/>
+              </a:spcAft>
+            </a:pPr>
+            <a:r>
+              <a:rPr sz="1500">
+                <a:solidFill>
+                  <a:srgbClr val="22282E"/>
+                </a:solidFill>
+              </a:rPr>
+              <a:t>•  Ransomware — Cifra los datos y exige un rescate</a:t>
+            </a:r>
+          </a:p>
+          <a:p>
+            <a:pPr>
+              <a:spcAft>
+                <a:spcPts val="600"/>
+              </a:spcAft>
+            </a:pPr>
+            <a:r>
+              <a:rPr sz="1500">
+                <a:solidFill>
+                  <a:srgbClr val="22282E"/>
+                </a:solidFill>
+              </a:rPr>
+              <a:t>•  RaaS — Ransomware como servicio: desarrolladores y afiliados</a:t>
+            </a:r>
+          </a:p>
+          <a:p>
+            <a:pPr>
+              <a:spcAft>
+                <a:spcPts val="600"/>
+              </a:spcAft>
+            </a:pPr>
+            <a:r>
+              <a:rPr sz="1500">
+                <a:solidFill>
+                  <a:srgbClr val="22282E"/>
+                </a:solidFill>
+              </a:rPr>
+              <a:t>•  Afiliado — Quien despliega el ransomware a cambio de un porcentaje</a:t>
+            </a:r>
+          </a:p>
+          <a:p>
+            <a:pPr>
+              <a:spcAft>
+                <a:spcPts val="600"/>
+              </a:spcAft>
+            </a:pPr>
+            <a:r>
+              <a:rPr sz="1500">
+                <a:solidFill>
+                  <a:srgbClr val="22282E"/>
+                </a:solidFill>
+              </a:rPr>
+              <a:t>•  Cadena de ataque — Acceso, lateral, exfiltración y cifrado final</a:t>
+            </a:r>
+          </a:p>
+          <a:p>
+            <a:pPr>
+              <a:spcAft>
+                <a:spcPts val="600"/>
+              </a:spcAft>
+            </a:pPr>
+            <a:r>
+              <a:rPr sz="1500">
+                <a:solidFill>
+                  <a:srgbClr val="22282E"/>
+                </a:solidFill>
+              </a:rPr>
+              <a:t>•  Esquema híbrido — AES por fichero + RSA para la clave AES</a:t>
+            </a:r>
+          </a:p>
+          <a:p>
+            <a:pPr>
+              <a:spcAft>
+                <a:spcPts val="600"/>
+              </a:spcAft>
+            </a:pPr>
+            <a:r>
+              <a:rPr sz="1500">
+                <a:solidFill>
+                  <a:srgbClr val="22282E"/>
+                </a:solidFill>
+              </a:rPr>
+              <a:t>•  Clave privada RSA — La tiene solo el atacante; hace irreversible el cifrado</a:t>
             </a:r>
           </a:p>
         </p:txBody>
@@ -4494,7 +4885,7 @@
                   <a:srgbClr val="0B3D2E"/>
                 </a:solidFill>
               </a:rPr>
-              <a:t>✍️ Ejercicios</a:t>
+              <a:t>🧰 Herramientas y preparación</a:t>
             </a:r>
           </a:p>
         </p:txBody>
@@ -4532,82 +4923,52 @@
                   <a:srgbClr val="22282E"/>
                 </a:solidFill>
               </a:rPr>
-              <a:t>•  Explica el cifrado híbrido y por qué hace inviable descifrar sin la clave privada.</a:t>
-            </a:r>
-          </a:p>
-          <a:p>
-            <a:pPr>
-              <a:spcAft>
-                <a:spcPts val="600"/>
-              </a:spcAft>
-            </a:pPr>
-            <a:r>
-              <a:rPr sz="1500">
-                <a:solidFill>
-                  <a:srgbClr val="22282E"/>
-                </a:solidFill>
-              </a:rPr>
-              <a:t>•  Detecta y documenta los comandos de borrado de shadow copies.</a:t>
-            </a:r>
-          </a:p>
-          <a:p>
-            <a:pPr>
-              <a:spcAft>
-                <a:spcPts val="600"/>
-              </a:spcAft>
-            </a:pPr>
-            <a:r>
-              <a:rPr sz="1500">
-                <a:solidFill>
-                  <a:srgbClr val="22282E"/>
-                </a:solidFill>
-              </a:rPr>
-              <a:t>•  Analiza una nota de rescate e infiere la familia.</a:t>
-            </a:r>
-          </a:p>
-          <a:p>
-            <a:pPr>
-              <a:spcAft>
-                <a:spcPts val="600"/>
-              </a:spcAft>
-            </a:pPr>
-            <a:r>
-              <a:rPr sz="1500">
-                <a:solidFill>
-                  <a:srgbClr val="22282E"/>
-                </a:solidFill>
-              </a:rPr>
-              <a:t>•  Propón 3 controles preventivos priorizados (backups, EDR, segmentación).</a:t>
-            </a:r>
-          </a:p>
-          <a:p>
-            <a:pPr>
-              <a:spcAft>
-                <a:spcPts val="600"/>
-              </a:spcAft>
-            </a:pPr>
-            <a:r>
-              <a:rPr sz="1500">
-                <a:solidFill>
-                  <a:srgbClr val="22282E"/>
-                </a:solidFill>
-              </a:rPr>
-              <a:t>•  Reconoce señales de exfiltración previa al cifrado.</a:t>
-            </a:r>
-          </a:p>
-          <a:p>
-            <a:pPr>
-              <a:spcAft>
-                <a:spcPts val="600"/>
-              </a:spcAft>
-            </a:pPr>
-            <a:r>
-              <a:rPr sz="1500">
-                <a:solidFill>
-                  <a:srgbClr val="22282E"/>
-                </a:solidFill>
-              </a:rPr>
-              <a:t>•  Diseña una detección temprana basada en el patrón de escritura masiva.</a:t>
+              <a:t>•  ProcMon/Process Hacker, Wireshark, Volatility para comportamiento.</a:t>
+            </a:r>
+          </a:p>
+          <a:p>
+            <a:pPr>
+              <a:spcAft>
+                <a:spcPts val="600"/>
+              </a:spcAft>
+            </a:pPr>
+            <a:r>
+              <a:rPr sz="1500">
+                <a:solidFill>
+                  <a:srgbClr val="22282E"/>
+                </a:solidFill>
+              </a:rPr>
+              <a:t>•  Ghidra/x64dbg para el módulo de cifrado.</a:t>
+            </a:r>
+          </a:p>
+          <a:p>
+            <a:pPr>
+              <a:spcAft>
+                <a:spcPts val="600"/>
+              </a:spcAft>
+            </a:pPr>
+            <a:r>
+              <a:rPr sz="1500">
+                <a:solidFill>
+                  <a:srgbClr val="22282E"/>
+                </a:solidFill>
+              </a:rPr>
+              <a:t>•  PEStudio/capa para detectar APIs de cripto (CryptGenKey, CryptEncrypt, BCrypt).</a:t>
+            </a:r>
+          </a:p>
+          <a:p>
+            <a:pPr>
+              <a:spcAft>
+                <a:spcPts val="600"/>
+              </a:spcAft>
+            </a:pPr>
+            <a:r>
+              <a:rPr sz="1500">
+                <a:solidFill>
+                  <a:srgbClr val="22282E"/>
+                </a:solidFill>
+              </a:rPr>
+              <a:t>•  Referencias: No More Ransom, informes de The DFIR Report.</a:t>
             </a:r>
           </a:p>
         </p:txBody>
@@ -4658,7 +5019,7 @@
                   <a:srgbClr val="0B3D2E"/>
                 </a:solidFill>
               </a:rPr>
-              <a:t>📝 Reto verificable</a:t>
+              <a:t>🧪 Laboratorio guiado</a:t>
             </a:r>
           </a:p>
         </p:txBody>
@@ -4696,22 +5057,97 @@
                   <a:srgbClr val="22282E"/>
                 </a:solidFill>
               </a:rPr>
-              <a:t>•  Entrega un informe de ransomware con: cadena de ataque mapeada a ATT&amp;CK, esquema de cifrado descrito, evidencia de borrado de backups, veredicto de recuperabilidad justificado e IOCs (incl. nota y extensión).</a:t>
-            </a:r>
-          </a:p>
-          <a:p>
-            <a:pPr>
-              <a:spcAft>
-                <a:spcPts val="600"/>
-              </a:spcAft>
-            </a:pPr>
-            <a:r>
-              <a:rPr sz="1500">
-                <a:solidFill>
-                  <a:srgbClr val="22282E"/>
-                </a:solidFill>
-              </a:rPr>
-              <a:t>•  Criterio de aceptación: el informe justifica con evidencia si el descifrado sin clave es posible, y la cadena incluye al menos las fases de ejecución, evasión (T1490) e impacto (T1486).</a:t>
+              <a:t>•  Restaura base-clean. Crea archivos señuelo (.docx, .txt, .jpg) en carpetas de usuario para observar el cifrado.</a:t>
+            </a:r>
+          </a:p>
+          <a:p>
+            <a:pPr>
+              <a:spcAft>
+                <a:spcPts val="600"/>
+              </a:spcAft>
+            </a:pPr>
+            <a:r>
+              <a:rPr sz="1500">
+                <a:solidFill>
+                  <a:srgbClr val="22282E"/>
+                </a:solidFill>
+              </a:rPr>
+              <a:t>•  Analiza estáticamente: con capa/PEStudio identifica APIs de cripto y enumeración de archivos (FindFirstFile, CryptEncrypt).</a:t>
+            </a:r>
+          </a:p>
+          <a:p>
+            <a:pPr>
+              <a:spcAft>
+                <a:spcPts val="600"/>
+              </a:spcAft>
+            </a:pPr>
+            <a:r>
+              <a:rPr sz="1500">
+                <a:solidFill>
+                  <a:srgbClr val="22282E"/>
+                </a:solidFill>
+              </a:rPr>
+              <a:t>•  Detona con ProcMon filtrando por CreateFile/WriteFile: observa el patrón de recorrido de directorios y la escritura de archivos cifrados (nueva extensión, marcador de cabecera).</a:t>
+            </a:r>
+          </a:p>
+          <a:p>
+            <a:pPr>
+              <a:spcAft>
+                <a:spcPts val="600"/>
+              </a:spcAft>
+            </a:pPr>
+            <a:r>
+              <a:rPr sz="1500">
+                <a:solidFill>
+                  <a:srgbClr val="22282E"/>
+                </a:solidFill>
+              </a:rPr>
+              <a:t>•  Busca el borrado de recuperación: vssadmin delete shadows, wbadmin, bcdedit. Anótalo como TTP (T1490).</a:t>
+            </a:r>
+          </a:p>
+          <a:p>
+            <a:pPr>
+              <a:spcAft>
+                <a:spcPts val="600"/>
+              </a:spcAft>
+            </a:pPr>
+            <a:r>
+              <a:rPr sz="1500">
+                <a:solidFill>
+                  <a:srgbClr val="22282E"/>
+                </a:solidFill>
+              </a:rPr>
+              <a:t>•  En Wireshark, comprueba si hay contacto C2 o exfiltración previa al cifrado (doble extorsión).</a:t>
+            </a:r>
+          </a:p>
+          <a:p>
+            <a:pPr>
+              <a:spcAft>
+                <a:spcPts val="600"/>
+              </a:spcAft>
+            </a:pPr>
+            <a:r>
+              <a:rPr sz="1500">
+                <a:solidFill>
+                  <a:srgbClr val="22282E"/>
+                </a:solidFill>
+              </a:rPr>
+              <a:t>•  En Ghidra, localiza el módulo de cifrado: ¿AES por archivo?, ¿cómo se genera y protege la clave?, ¿RSA embebido? Documenta el esquema.</a:t>
+            </a:r>
+          </a:p>
+          <a:p>
+            <a:pPr>
+              <a:spcAft>
+                <a:spcPts val="600"/>
+              </a:spcAft>
+            </a:pPr>
+            <a:r>
+              <a:rPr sz="1500">
+                <a:solidFill>
+                  <a:srgbClr val="22282E"/>
+                </a:solidFill>
+              </a:rPr>
+              <a:t>•  Evalúa la recuperación: ¿clave reutilizada?, ¿IV predecible?, ¿nota con ID de víctima? Contrasta con No More Ransom.</a:t>
             </a:r>
           </a:p>
         </p:txBody>
